--- a/docs/DaoTao/Buoi01_LamQuenFastBcode.pptx
+++ b/docs/DaoTao/Buoi01_LamQuenFastBcode.pptx
@@ -518,7 +518,7 @@
           </a:p>
           <a:p>
             <a:r>
-              <a:t>Chuẩn bị: Máy đã cài Bcode, BcodeViewer; có 1 dự án thử (site + database bản sao).</a:t>
+              <a:t>Chuẩn bị: Máy đã cài Bcode và BcodeViewer; có 1 dự án thử (site và bản sao database).</a:t>
             </a:r>
           </a:p>
           <a:p>
@@ -593,17 +593,17 @@
           <a:lstStyle/>
           <a:p>
             <a:r>
-              <a:t>Giới thiệu các vùng: ① Settings, ② Actions (mọi công cụ kèm phím tắt), ③ giỏ script, ④ menu Triển khai, ⑤ Tool mở rộng, ⑥ Trợ giúp, ⑦ ô WS chọn database, ⑧ Sys/App, ⑨ Quick Access, ⑩ thanh công cụ, ⑪ cột icon SQL Object / WCommand / Mobile.</a:t>
-            </a:r>
-          </a:p>
-          <a:p>
-            <a:r>
-              <a:t>Phím quan trọng nhất: Ctrl+P — Command Palette. Gõ &gt; để tìm công cụ, # để tìm object SQL, @ để tìm menu WCommand, $ để tìm snippet. Quên nút ở đâu thì gõ vào đây.</a:t>
-            </a:r>
-          </a:p>
-          <a:p>
-            <a:r>
-              <a:t>Ctrl+F1 mở Trợ giúp đúng mục của tab đang dùng.</a:t>
+              <a:t>Giới thiệu các vùng trên màn hình: ① Settings, ② Actions (danh sách mọi công cụ kèm phím tắt), ③ giỏ script (Script Cart), ④ menu Triển khai, ⑤ Tool mở rộng, ⑥ Trợ giúp, ⑦ ô WS để chọn database, ⑧ nút Sys/App, ⑨ Quick Access, ⑩ thanh công cụ, ⑪ cột icon bên trái: SQL Object / WCommand / Mobile.</a:t>
+            </a:r>
+          </a:p>
+          <a:p>
+            <a:r>
+              <a:t>Phím quan trọng nhất: Ctrl+P — mở Command Palette. Gõ &gt; để tìm công cụ, # để tìm object SQL, @ để tìm menu WCommand, $ để tìm snippet. Quên một nút nằm ở đâu thì cứ gõ tên vào đây.</a:t>
+            </a:r>
+          </a:p>
+          <a:p>
+            <a:r>
+              <a:t>Ctrl+F1 mở Trợ giúp, nhảy đúng tới mục của tab đang dùng.</a:t>
             </a:r>
           </a:p>
         </p:txBody>
@@ -678,7 +678,7 @@
           </a:p>
           <a:p>
             <a:r>
-              <a:t>Bài tập về nhà: Vẽ sơ đồ đường đi của 1 menu danh mục và 1 menu chứng từ bất kỳ (bảng, trang, các file controller).</a:t>
+              <a:t>Bài tập về nhà: Vẽ sơ đồ đường đi của 1 menu danh mục và 1 menu chứng từ bất kỳ (gồm bảng, trang và các file controller).</a:t>
             </a:r>
           </a:p>
         </p:txBody>
@@ -753,12 +753,12 @@
           </a:p>
           <a:p>
             <a:r>
-              <a:t>1. Sys Data — wcommand (kèm command).</a:t>
-            </a:r>
-          </a:p>
-          <a:p>
-            <a:r>
-              <a:t>2. Thuộc tính Controller="Department" — cho biết controller nào chạy.</a:t>
+              <a:t>1. Ở Sys Data, bảng wcommand (đi kèm bảng command).</a:t>
+            </a:r>
+          </a:p>
+          <a:p>
+            <a:r>
+              <a:t>2. Thuộc tính Controller="Department", cho biết trang chạy controller nào.</a:t>
             </a:r>
           </a:p>
           <a:p>
@@ -768,7 +768,7 @@
           </a:p>
           <a:p>
             <a:r>
-              <a:t>4. status, datetime0/2, user_id0/2 (tạo / sửa).</a:t>
+              <a:t>4. status, datetime0/2, user_id0/2 (đuôi 0: lúc tạo, đuôi 2: lúc sửa).</a:t>
             </a:r>
           </a:p>
         </p:txBody>
@@ -843,17 +843,17 @@
           </a:p>
           <a:p>
             <a:r>
-              <a:t>- Biết một hệ thống FBO gồm những lớp nào, source nằm ở đâu</a:t>
-            </a:r>
-          </a:p>
-          <a:p>
-            <a:r>
-              <a:t>- Hiểu một menu chạy ra sao: wcommand → trang .aspx → Grid / Dir / Lookup</a:t>
-            </a:r>
-          </a:p>
-          <a:p>
-            <a:r>
-              <a:t>- Phân biệt Sys Data / App Data, bảng danh mục, chứng từ, bảng phân kỳ</a:t>
+              <a:t>- Biết hệ thống FBO gồm những lớp nào và source nằm ở đâu</a:t>
+            </a:r>
+          </a:p>
+          <a:p>
+            <a:r>
+              <a:t>- Hiểu một menu chạy ra sao: từ wcommand đến trang .aspx, rồi tới Grid / Dir / Lookup</a:t>
+            </a:r>
+          </a:p>
+          <a:p>
+            <a:r>
+              <a:t>- Phân biệt Sys Data với App Data; bảng danh mục, chứng từ và bảng phân kỳ</a:t>
             </a:r>
           </a:p>
           <a:p>
@@ -873,7 +873,7 @@
           </a:p>
           <a:p>
             <a:r>
-              <a:t>2. Một menu chạy như thế nào, entity (30')</a:t>
+              <a:t>2. Một menu chạy như thế nào; entity là gì (30')</a:t>
             </a:r>
           </a:p>
           <a:p>
@@ -888,7 +888,7 @@
           </a:p>
           <a:p>
             <a:r>
-              <a:t>5. Thực hành + hỏi đáp (30')</a:t>
+              <a:t>5. Thực hành và hỏi đáp (30')</a:t>
             </a:r>
           </a:p>
         </p:txBody>
@@ -963,27 +963,27 @@
           </a:p>
           <a:p>
             <a:r>
-              <a:t>Lớp 1: trình duyệt — người dùng chỉ thấy web.</a:t>
-            </a:r>
-          </a:p>
-          <a:p>
-            <a:r>
-              <a:t>Lớp 2: site trên IIS. Đây là thư mục chứa các trang .aspx trong Main và toàn bộ controller trong App_Data\Controllers. Lập trình viên sửa ở đây.</a:t>
-            </a:r>
-          </a:p>
-          <a:p>
-            <a:r>
-              <a:t>Lớp 3: SQL Server với 2 database. Sys Data chứa dữ liệu hệ thống như menu, người dùng, phân quyền. App Data chứa dữ liệu nghiệp vụ của khách: danh mục, chứng từ, số dư.</a:t>
-            </a:r>
-          </a:p>
-          <a:p>
-            <a:r>
-              <a:t>Điều quan trọng: màn hình Fast được khai báo bằng XML (FCode) chứ không lập trình C#. Vì vậy 3 việc chính là controller, procedure, menu.</a:t>
-            </a:r>
-          </a:p>
-          <a:p>
-            <a:r>
-              <a:t>Trong Bcode, một "dự án" gói đủ server, 2 database, Source Path (đường dẫn site) và link web.</a:t>
+              <a:t>Lớp 1: trình duyệt — người dùng chỉ nhìn thấy giao diện web.</a:t>
+            </a:r>
+          </a:p>
+          <a:p>
+            <a:r>
+              <a:t>Lớp 2: site web chạy trên IIS. Đây là thư mục chứa các trang .aspx trong Main và toàn bộ controller trong App_Data\Controllers. Lập trình viên sửa source ở lớp này.</a:t>
+            </a:r>
+          </a:p>
+          <a:p>
+            <a:r>
+              <a:t>Lớp 3: SQL Server với 2 database. Sys Data chứa dữ liệu hệ thống như menu, người dùng, phân quyền. App Data chứa dữ liệu nghiệp vụ của khách hàng: danh mục, chứng từ, số dư.</a:t>
+            </a:r>
+          </a:p>
+          <a:p>
+            <a:r>
+              <a:t>Điều quan trọng: màn hình Fast được khai báo bằng file XML (gọi là FCode) chứ không lập trình bằng C#. Vì vậy ba việc chính của lập trình viên triển khai là sửa controller, procedure và menu.</a:t>
+            </a:r>
+          </a:p>
+          <a:p>
+            <a:r>
+              <a:t>Trong Bcode, một "dự án" gói đủ thông tin: server, 2 database, Source Path (đường dẫn tới thư mục site) và link web.</a:t>
             </a:r>
           </a:p>
         </p:txBody>
@@ -1058,27 +1058,27 @@
           </a:p>
           <a:p>
             <a:r>
-              <a:t>Dir là form một bản ghi, Grid là lưới nhiều dòng, Lookup là danh sách tra cứu, Filter là form điều kiện của báo cáo và form import, Report khai báo mẫu in.</a:t>
-            </a:r>
-          </a:p>
-          <a:p>
-            <a:r>
-              <a:t>Include chứa phần dùng chung được nhúng vào controller bằng entity.</a:t>
-            </a:r>
-          </a:p>
-          <a:p>
-            <a:r>
-              <a:t>Templates\Excel chứa mẫu Excel của báo cáo — Report gọi bằng templateFile; Templates\Rpt chứa mẫu Crystal Report — gọi bằng reportFile; Templates\Upload là mẫu import.</a:t>
-            </a:r>
-          </a:p>
-          <a:p>
-            <a:r>
-              <a:t>Số lượng file ở bản FBO mẫu: Dir khoảng 690, Grid 2.250, Filter 2.200, Main khoảng 1.500 trang. Không ai nhớ hết, nên luôn tìm theo menu bằng Bcode (chương 4).</a:t>
-            </a:r>
-          </a:p>
-          <a:p>
-            <a:r>
-              <a:t>Về đuôi file: .xml là bản nguồn đọc được, .f là bản Fast phát hành (phần lệnh thường bị mã hoá trong &lt;Encrypted&gt;). Khi cùng tên có cả .f và .xml thì file nào được dùng cần kiểm tra ở dự án.</a:t>
+              <a:t>Dir là form một bản ghi, Grid là lưới nhiều dòng, Lookup là danh sách tra cứu, Filter là form điều kiện của báo cáo và form import / xử lý, Report khai báo mẫu in.</a:t>
+            </a:r>
+          </a:p>
+          <a:p>
+            <a:r>
+              <a:t>Include chứa các phần dùng chung, được nhúng vào controller bằng entity.</a:t>
+            </a:r>
+          </a:p>
+          <a:p>
+            <a:r>
+              <a:t>Templates\Excel chứa mẫu Excel của báo cáo — file Report gọi tới bằng thuộc tính templateFile; Templates\Rpt chứa mẫu Crystal Report — gọi bằng reportFile; Templates\Upload chứa mẫu file import.</a:t>
+            </a:r>
+          </a:p>
+          <a:p>
+            <a:r>
+              <a:t>Số lượng file ở bản FBO mẫu: Dir khoảng 690, Grid 2.250, Filter 2.200, Main khoảng 1.500 trang. Không ai nhớ hết được, nên luôn tìm file theo menu bằng Bcode (chương 4).</a:t>
+            </a:r>
+          </a:p>
+          <a:p>
+            <a:r>
+              <a:t>Về đuôi file: .xml là bản nguồn đọc được, .f là bản Fast phát hành (phần lệnh thường bị mã hoá trong thẻ &lt;Encrypted&gt;). Khi cùng một tên có cả .f và .xml thì phải kiểm tra trên dự án xem file nào thực sự được dùng.</a:t>
             </a:r>
           </a:p>
         </p:txBody>
@@ -1148,7 +1148,7 @@
           <a:lstStyle/>
           <a:p>
             <a:r>
-              <a:t>Theo dõi đường đi của một menu: bảng wcommand trong Sys Data có dòng menu, link trỏ tới trang smbp.aspx.</a:t>
+              <a:t>Ta theo dõi đường đi của một menu. Trong Sys Data, bảng wcommand có một dòng cho menu này; cột link trỏ tới trang smbp.aspx.</a:t>
             </a:r>
           </a:p>
           <a:p>
@@ -1158,22 +1158,22 @@
           </a:p>
           <a:p>
             <a:r>
-              <a:t>Fast mở Grid\Department.f — lưới danh sách bộ phận, bảng dmbp. Bấm Thêm / Sửa thì mở Dir\Department.f, cùng bảng, khoá ma_bp.</a:t>
-            </a:r>
-          </a:p>
-          <a:p>
-            <a:r>
-              <a:t>Ở màn khác có field ma_bp thì tra cứu bằng Lookup\Department.xml. Import Excel dùng Filter\DepartmentImport.f.</a:t>
-            </a:r>
-          </a:p>
-          <a:p>
-            <a:r>
-              <a:t>Trang báo cáo khác ở chỗ có FilterMode="true".</a:t>
-            </a:r>
-          </a:p>
-          <a:p>
-            <a:r>
-              <a:t>Trong Bcode, chỉ cần double-click menu trên cây WCommand là ra đủ danh sách file này.</a:t>
+              <a:t>Từ đó Fast mở Grid\Department.f — lưới danh sách bộ phận, đọc từ bảng dmbp. Bấm Thêm hoặc Sửa thì Fast mở Dir\Department.f, dùng cùng bảng dmbp, khoá là cột ma_bp.</a:t>
+            </a:r>
+          </a:p>
+          <a:p>
+            <a:r>
+              <a:t>Ở màn hình khác, field ma_bp tra cứu bộ phận bằng Lookup\Department.xml. Chức năng import Excel dùng Filter\DepartmentImport.f.</a:t>
+            </a:r>
+          </a:p>
+          <a:p>
+            <a:r>
+              <a:t>Trang báo cáo khác ở chỗ có thêm FilterMode="true": Fast mở form điều kiện trước, người dùng bấm Nhận thì mới chạy procedure.</a:t>
+            </a:r>
+          </a:p>
+          <a:p>
+            <a:r>
+              <a:t>Trong Bcode, chỉ cần double-click menu trên cây WCommand là ra đủ danh sách các file này.</a:t>
             </a:r>
           </a:p>
         </p:txBody>
@@ -1243,27 +1243,27 @@
           <a:lstStyle/>
           <a:p>
             <a:r>
-              <a:t>Hai database với vai trò khác nhau. Lỗi kinh điển của người mới: mở SQL Query ở Sys rồi tìm bảng dmkh — bảng này ở App.</a:t>
-            </a:r>
-          </a:p>
-          <a:p>
-            <a:r>
-              <a:t>Menu: wcommand là cây menu web với wmenu_id (mã menu, ví dụ 09.30.03), wmenu_id0 (menu cha), bar (tên Việt), bar2 (tên Anh), link (trang .aspx), sysid.</a:t>
-            </a:r>
-          </a:p>
-          <a:p>
-            <a:r>
-              <a:t>command chứa thông tin hệ thống của chức năng theo sysid: syscode, type...</a:t>
-            </a:r>
-          </a:p>
-          <a:p>
-            <a:r>
-              <a:t>Bcode lưu menu vào cả hai bảng trong một transaction, và có lệnh Gen Script Menu (F12 trên cây WCommand) sinh DELETE + INSERT cho cả hai bảng — dùng cái này thay vì tự viết INSERT.</a:t>
-            </a:r>
-          </a:p>
-          <a:p>
-            <a:r>
-              <a:t>Tên cột cụ thể của wcommand / command có thể khác giữa phiên bản, nên xem cấu trúc trước.</a:t>
+              <a:t>Hai database có vai trò khác nhau. Lỗi kinh điển của người mới: mở SQL Query trên database Sys rồi tìm bảng dmkh — trong khi bảng này nằm ở App.</a:t>
+            </a:r>
+          </a:p>
+          <a:p>
+            <a:r>
+              <a:t>Menu: bảng wcommand là cây menu web, gồm các cột wmenu_id (mã menu, ví dụ 09.30.03), wmenu_id0 (mã menu cha), bar (tên tiếng Việt), bar2 (tên tiếng Anh), link (trang .aspx), sysid.</a:t>
+            </a:r>
+          </a:p>
+          <a:p>
+            <a:r>
+              <a:t>Bảng command chứa thông tin hệ thống của từng chức năng theo sysid, ví dụ syscode, type...</a:t>
+            </a:r>
+          </a:p>
+          <a:p>
+            <a:r>
+              <a:t>Bcode lưu menu vào cả hai bảng trong cùng một transaction. Bcode cũng có lệnh Gen Script Menu (bấm F12 trên cây WCommand) sinh câu DELETE + INSERT cho cả hai bảng — hãy dùng lệnh này thay vì tự viết INSERT.</a:t>
+            </a:r>
+          </a:p>
+          <a:p>
+            <a:r>
+              <a:t>Tên cột cụ thể của wcommand và command có thể khác nhau giữa các phiên bản, nên xem cấu trúc bảng trước khi viết script.</a:t>
             </a:r>
           </a:p>
         </p:txBody>
@@ -1333,17 +1333,17 @@
           <a:lstStyle/>
           <a:p>
             <a:r>
-              <a:t>Bảng danh mục là bảng mã – tên. Danh mục chuẩn của Fast đặt tên dm + tên: dmkh khách hàng, dmvt vật tư, dmbp bộ phận, dmtk tài khoản.</a:t>
-            </a:r>
-          </a:p>
-          <a:p>
-            <a:r>
-              <a:t>Danh mục tự thêm cho dự án: quy ước của Bcode là zdm + chữ cái đầu các từ để không lẫn với bảng chuẩn.</a:t>
-            </a:r>
-          </a:p>
-          <a:p>
-            <a:r>
-              <a:t>Cột hệ thống bắt buộc nhớ: status, datetime0/user_id0 (tạo), datetime2/user_id2 (sửa). Mẫu danh mục của Bcode gán chúng ở command Inserting và Updated:</a:t>
+              <a:t>Bảng danh mục là bảng lưu cặp mã – tên. Danh mục chuẩn của Fast đặt tên theo dạng dm + tên: dmkh là khách hàng, dmvt là vật tư, dmbp là bộ phận, dmtk là tài khoản.</a:t>
+            </a:r>
+          </a:p>
+          <a:p>
+            <a:r>
+              <a:t>Danh mục tự thêm cho dự án: quy ước của Bcode là zdm + chữ cái đầu của các từ, để không lẫn với bảng chuẩn. Ví dụ Hình thức bán hàng thành zdmhtbh.</a:t>
+            </a:r>
+          </a:p>
+          <a:p>
+            <a:r>
+              <a:t>Các cột hệ thống bắt buộc phải nhớ: status; datetime0 và user_id0 (ngày và người tạo); datetime2 và user_id2 (ngày và người sửa lần cuối). Mẫu danh mục của Bcode gán các cột này trong command Inserting và Updated, ví dụ:</a:t>
             </a:r>
           </a:p>
           <a:p>
@@ -1353,7 +1353,7 @@
           </a:p>
           <a:p>
             <a:r>
-              <a:t>Thiếu các cột này thì nút Chuẩn Fast của Bcode sẽ cảnh báo.</a:t>
+              <a:t>Nếu bảng thiếu các cột này thì nút Chuẩn Fast của Bcode sẽ cảnh báo.</a:t>
             </a:r>
           </a:p>
         </p:txBody>
@@ -1423,27 +1423,27 @@
           <a:lstStyle/>
           <a:p>
             <a:r>
-              <a:t>Chứng từ lưu ở cặp bảng master – detail. Ví dụ phiếu nhập kho: master m74, detail d74, nối bằng stt_rec; chi tiết có thêm line_nbr.</a:t>
-            </a:r>
-          </a:p>
-          <a:p>
-            <a:r>
-              <a:t>Bảng phân kỳ: dữ liệu tách theo tháng với đuôi $yyyymm. $000000 là bảng mẫu; khi xem bằng Bcode (Table, Command) thì $000000 được gộp UNION ALL tất cả các kỳ.</a:t>
-            </a:r>
-          </a:p>
-          <a:p>
-            <a:r>
-              <a:t>Bảng dmct9 trong App Data khai cho từng mã chứng từ các tiền tố bảng (cột c$, m$, d$, i$) và trang url. Muốn biết chứng từ dùng bảng nào: SELECT * FROM dmct9 WHERE ma_ct = '...'.</a:t>
-            </a:r>
-          </a:p>
-          <a:p>
-            <a:r>
-              <a:t>Cảnh báo quan trọng: Fast ghép các kỳ theo vị trí cột, nên mọi kỳ phải cùng cấu trúc và cùng thứ tự cột. Thêm cột phải làm cho mọi kỳ — dùng Gen Add Column của Bcode, sau đó chuột phải ô Table → Check Partitions Struct để kiểm tra.</a:t>
-            </a:r>
-          </a:p>
-          <a:p>
-            <a:r>
-              <a:t>Ý nghĩa chính xác các tiền tố c, i... khác nhau theo phân hệ — cần kiểm tra ở dự án.</a:t>
+              <a:t>Chứng từ được lưu ở một cặp bảng master – detail. Ví dụ phiếu nhập kho: bảng master là m74 (đầu phiếu), bảng detail là d74 (các dòng chi tiết), hai bảng nối với nhau bằng stt_rec; bảng chi tiết có thêm cột line_nbr là số thứ tự dòng.</a:t>
+            </a:r>
+          </a:p>
+          <a:p>
+            <a:r>
+              <a:t>Bảng phân kỳ: dữ liệu được tách theo tháng, mỗi tháng một bảng với đuôi $yyyymm. $000000 là bảng mẫu; khi xem bằng Bcode (tab Table, Command) thì $000000 được gộp UNION ALL tất cả các kỳ.</a:t>
+            </a:r>
+          </a:p>
+          <a:p>
+            <a:r>
+              <a:t>Bảng dmct9 trong App Data khai báo, cho từng mã chứng từ, các tiền tố bảng (cột c$, m$, d$, i$) và trang url. Muốn biết một chứng từ dùng bảng nào thì chạy: SELECT * FROM dmct9 WHERE ma_ct = '...'.</a:t>
+            </a:r>
+          </a:p>
+          <a:p>
+            <a:r>
+              <a:t>Cảnh báo quan trọng: Fast ghép các kỳ theo vị trí cột, nên mọi kỳ phải cùng cấu trúc và cùng thứ tự cột. Thêm cột thì phải thêm cho mọi kỳ — dùng Gen Add Column của Bcode, sau đó chuột phải ô Table, chọn Check Partitions Struct để kiểm tra.</a:t>
+            </a:r>
+          </a:p>
+          <a:p>
+            <a:r>
+              <a:t>Ý nghĩa chính xác của các tiền tố c, i... khác nhau theo từng phân hệ — cần kiểm tra lại ở dự án.</a:t>
             </a:r>
           </a:p>
         </p:txBody>
@@ -1513,27 +1513,27 @@
           <a:lstStyle/>
           <a:p>
             <a:r>
-              <a:t>Mở Bcode là ra màn Projects (hoặc Ctrl+Shift+P). Gõ để lọc, Enter hoặc double-click để chọn. Dải Last Access là dự án dùng gần đây.</a:t>
-            </a:r>
-          </a:p>
-          <a:p>
-            <a:r>
-              <a:t>Dự án mới: + New, khai server, Sys Data, App Data, Source Path (bắt buộc cho File Lookup và Gen Update), Login WLink. Hoặc Ctrl+F5 Synchronize để đồng bộ từ FSG — nhớ bấm Apply / Save.</a:t>
-            </a:r>
-          </a:p>
-          <a:p>
-            <a:r>
-              <a:t>Ctrl+O chọn dự án khác — nếu cửa sổ đang có tab sẽ mở Bcode mới. Ctrl+Shift+N mở thêm cửa sổ.</a:t>
-            </a:r>
-          </a:p>
-          <a:p>
-            <a:r>
-              <a:t>Ô WS trên thanh trên chọn database đang làm; Sys / App hoặc Ctrl+1 để đổi; nút ⟳ Refresh database sau khi tạo bảng / procedure mới.</a:t>
-            </a:r>
-          </a:p>
-          <a:p>
-            <a:r>
-              <a:t>Mật khẩu trong settings.json được mã hoá theo tài khoản Windows — chép sang máy khác phải nhập lại. Không gửi file này cho người khác.</a:t>
+              <a:t>Mở Bcode là vào màn hình Projects (hoặc bấm Ctrl+Shift+P). Gõ tên để lọc, bấm Enter hoặc double-click để chọn dự án. Dải Last Access là các dự án dùng gần đây.</a:t>
+            </a:r>
+          </a:p>
+          <a:p>
+            <a:r>
+              <a:t>Thêm dự án mới: bấm + New, khai báo server, Sys Data, App Data, Source Path (bắt buộc phải có để dùng File Lookup và Gen Update), Login WLink. Hoặc bấm Ctrl+F5 Synchronize để đồng bộ từ FSG — xong nhớ bấm Apply / Save.</a:t>
+            </a:r>
+          </a:p>
+          <a:p>
+            <a:r>
+              <a:t>Ctrl+O để chọn dự án khác — nếu cửa sổ hiện tại đang có tab mở thì Bcode sẽ mở một cửa sổ Bcode mới. Ctrl+Shift+N mở thêm cửa sổ.</a:t>
+            </a:r>
+          </a:p>
+          <a:p>
+            <a:r>
+              <a:t>Ô WS trên thanh trên cùng dùng để chọn database đang làm việc; bấm nút Sys / App hoặc Ctrl+1 để đổi qua lại; bấm nút ⟳ Refresh database sau khi vừa tạo bảng hoặc procedure mới.</a:t>
+            </a:r>
+          </a:p>
+          <a:p>
+            <a:r>
+              <a:t>Mật khẩu trong file settings.json được mã hoá theo tài khoản Windows — chép file sang máy khác thì phải nhập lại mật khẩu. Không gửi file này cho người khác.</a:t>
             </a:r>
           </a:p>
         </p:txBody>
@@ -5157,7 +5157,7 @@
                 <a:ea typeface="Segoe UI"/>
                 <a:cs typeface="Segoe UI"/>
               </a:rPr>
-              <a:t> object</a:t>
+              <a:t> object SQL</a:t>
             </a:r>
           </a:p>
           <a:p>
@@ -5624,7 +5624,7 @@
                 <a:ea typeface="Segoe UI"/>
                 <a:cs typeface="Segoe UI"/>
               </a:rPr>
-              <a:t> Chọn dự án thử trong Bcode, đổi qua lại App / Sys (</a:t>
+              <a:t> Chọn dự án thử trong Bcode, chuyển qua lại giữa App và Sys (</a:t>
             </a:r>
             <a:r>
               <a:rPr sz="1900" b="0" i="0">
@@ -5686,7 +5686,7 @@
                 <a:ea typeface="Segoe UI"/>
                 <a:cs typeface="Segoe UI"/>
               </a:rPr>
-              <a:t> Trên cây WCommand tìm menu “Danh mục bộ phận”, double-click xem danh sách file.</a:t>
+              <a:t> Trên cây WCommand, tìm menu “Danh mục bộ phận” rồi double-click để xem danh sách file.</a:t>
             </a:r>
           </a:p>
           <a:p>
@@ -5770,7 +5770,7 @@
                 <a:ea typeface="Segoe UI"/>
                 <a:cs typeface="Segoe UI"/>
               </a:rPr>
-              <a:t>), ghi lại tiền tố bảng.</a:t>
+              <a:t>) và ghi lại tiền tố tên bảng của nó.</a:t>
             </a:r>
           </a:p>
         </p:txBody>
@@ -6116,7 +6116,7 @@
                 <a:ea typeface="Segoe UI"/>
                 <a:cs typeface="Segoe UI"/>
               </a:rPr>
-              <a:t> Vẽ sơ đồ đường đi của 1 menu danh mục và 1 menu chứng từ bất kỳ (bảng, trang, các file controller).</a:t>
+              <a:t> Vẽ sơ đồ đường đi của 1 menu danh mục và 1 menu chứng từ bất kỳ (gồm bảng, trang và các file controller).</a:t>
             </a:r>
           </a:p>
         </p:txBody>
@@ -6568,7 +6568,7 @@
                 <a:ea typeface="Segoe UI"/>
                 <a:cs typeface="Segoe UI"/>
               </a:rPr>
-              <a:t> Bốn cột hệ thống của danh mục?</a:t>
+              <a:t> Năm cột hệ thống của bảng danh mục là gì?</a:t>
             </a:r>
           </a:p>
         </p:txBody>
@@ -6882,7 +6882,7 @@
                 <a:ea typeface="Segoe UI"/>
                 <a:cs typeface="Segoe UI"/>
               </a:rPr>
-              <a:t>Biết một hệ thống FBO gồm những lớp nào, source nằm ở đâu</a:t>
+              <a:t>Biết hệ thống FBO gồm những lớp nào và source nằm ở đâu</a:t>
             </a:r>
           </a:p>
           <a:p>
@@ -6911,7 +6911,7 @@
                 <a:ea typeface="Segoe UI"/>
                 <a:cs typeface="Segoe UI"/>
               </a:rPr>
-              <a:t>Hiểu một menu chạy ra sao: wcommand → trang .aspx → Grid / Dir / Lookup</a:t>
+              <a:t>Hiểu một menu chạy ra sao: từ wcommand đến trang .aspx, rồi tới Grid / Dir / Lookup</a:t>
             </a:r>
           </a:p>
           <a:p>
@@ -6940,7 +6940,7 @@
                 <a:ea typeface="Segoe UI"/>
                 <a:cs typeface="Segoe UI"/>
               </a:rPr>
-              <a:t>Phân biệt Sys Data / App Data, bảng danh mục, chứng từ, bảng phân kỳ</a:t>
+              <a:t>Phân biệt Sys Data với App Data; bảng danh mục, chứng từ và bảng phân kỳ</a:t>
             </a:r>
           </a:p>
           <a:p>
@@ -7184,7 +7184,7 @@
                           <a:ea typeface="Segoe UI"/>
                           <a:cs typeface="Segoe UI"/>
                         </a:rPr>
-                        <a:t>Một menu chạy như thế nào, entity</a:t>
+                        <a:t>Một menu chạy như thế nào; entity là gì</a:t>
                       </a:r>
                     </a:p>
                   </a:txBody>
@@ -7406,7 +7406,7 @@
                           <a:ea typeface="Segoe UI"/>
                           <a:cs typeface="Segoe UI"/>
                         </a:rPr>
-                        <a:t>Thực hành + hỏi đáp</a:t>
+                        <a:t>Thực hành và hỏi đáp</a:t>
                       </a:r>
                     </a:p>
                   </a:txBody>
@@ -7580,7 +7580,7 @@
                 <a:ea typeface="Segoe UI"/>
                 <a:cs typeface="Segoe UI"/>
               </a:rPr>
-              <a:t> Chuẩn bị: Máy đã cài Bcode, BcodeViewer; có 1 dự án thử (site + database bản sao)</a:t>
+              <a:t> Chuẩn bị: Máy đã cài Bcode và BcodeViewer; có 1 dự án thử (site và bản sao database)</a:t>
             </a:r>
           </a:p>
         </p:txBody>
@@ -7925,7 +7925,7 @@
                 <a:ea typeface="Segoe UI"/>
                 <a:cs typeface="Segoe UI"/>
               </a:rPr>
-              <a:t>Người dùng đăng nhập theo Login WLink, mở menu</a:t>
+              <a:t>Người dùng vào link web (Login WLink), đăng nhập, mở menu</a:t>
             </a:r>
           </a:p>
         </p:txBody>
@@ -8418,7 +8418,7 @@
                 <a:ea typeface="Segoe UI"/>
                 <a:cs typeface="Segoe UI"/>
               </a:rPr>
-              <a:t>Việc của lập trình viên triển khai: sửa / thêm </a:t>
+              <a:t>Việc của lập trình viên triển khai: sửa hoặc thêm </a:t>
             </a:r>
             <a:r>
               <a:rPr sz="1900" b="1" i="0">
@@ -8513,7 +8513,7 @@
                 <a:ea typeface="Segoe UI"/>
                 <a:cs typeface="Segoe UI"/>
               </a:rPr>
-              <a:t>Mỗi dự án = 1 site + 2 database riêng → trong Bcode gọi là </a:t>
+              <a:t>Mỗi dự án gồm 1 site và 2 database riêng; trong Bcode gọi là </a:t>
             </a:r>
             <a:r>
               <a:rPr sz="1900" b="1" i="0">
@@ -8524,7 +8524,7 @@
                 <a:ea typeface="Segoe UI"/>
                 <a:cs typeface="Segoe UI"/>
               </a:rPr>
-              <a:t>dự án / workspace</a:t>
+              <a:t>dự án (workspace)</a:t>
             </a:r>
             <a:r>
               <a:rPr sz="1900" b="0" i="0">
@@ -8876,7 +8876,7 @@
                           <a:ea typeface="Segoe UI"/>
                           <a:cs typeface="Segoe UI"/>
                         </a:rPr>
-                        <a:t>Trang của từng menu — chỉ khai </a:t>
+                        <a:t>Trang của từng menu — chỉ khai báo </a:t>
                       </a:r>
                       <a:r>
                         <a:rPr sz="1400" b="0" i="0">
@@ -8937,7 +8937,7 @@
                           <a:ea typeface="Segoe UI"/>
                           <a:cs typeface="Segoe UI"/>
                         </a:rPr>
-                        <a:t>Form 1 bản ghi: danh mục, chứng từ, form điều kiện</a:t>
+                        <a:t>Form một bản ghi: danh mục, chứng từ, form điều kiện</a:t>
                       </a:r>
                     </a:p>
                   </a:txBody>
@@ -9087,7 +9087,7 @@
                           <a:ea typeface="Segoe UI"/>
                           <a:cs typeface="Segoe UI"/>
                         </a:rPr>
-                        <a:t>Điều kiện lọc báo cáo, form import / xử lý</a:t>
+                        <a:t>Điều kiện lọc báo cáo, form import, form xử lý</a:t>
                       </a:r>
                     </a:p>
                   </a:txBody>
@@ -9137,7 +9137,7 @@
                           <a:ea typeface="Segoe UI"/>
                           <a:cs typeface="Segoe UI"/>
                         </a:rPr>
-                        <a:t>Khai báo mẫu in / xuất Excel</a:t>
+                        <a:t>Khai báo mẫu in và xuất Excel</a:t>
                       </a:r>
                     </a:p>
                   </a:txBody>
@@ -9187,7 +9187,7 @@
                           <a:ea typeface="Segoe UI"/>
                           <a:cs typeface="Segoe UI"/>
                         </a:rPr>
-                        <a:t>Entity, đoạn XML / JavaScript dùng chung</a:t>
+                        <a:t>Entity, đoạn XML và JavaScript dùng chung</a:t>
                       </a:r>
                     </a:p>
                   </a:txBody>
@@ -9453,7 +9453,7 @@
                 <a:ea typeface="Segoe UI"/>
                 <a:cs typeface="Segoe UI"/>
               </a:rPr>
-              <a:t> = bản nguồn đọc được · </a:t>
+              <a:t> là bản nguồn đọc được · </a:t>
             </a:r>
             <a:r>
               <a:rPr sz="1200" b="0" i="0">
@@ -9475,7 +9475,7 @@
                 <a:ea typeface="Segoe UI"/>
                 <a:cs typeface="Segoe UI"/>
               </a:rPr>
-              <a:t> = bản phát hành (có thể mã hoá </a:t>
+              <a:t> là bản phát hành (có thể mã hoá </a:t>
             </a:r>
             <a:r>
               <a:rPr sz="1200" b="0" i="0">
@@ -9497,7 +9497,7 @@
                 <a:ea typeface="Segoe UI"/>
                 <a:cs typeface="Segoe UI"/>
               </a:rPr>
-              <a:t>). Có cả hai thì file nào chạy — kiểm tra ở dự án.</a:t>
+              <a:t>). Có cả hai thì kiểm tra ở dự án xem file nào chạy.</a:t>
             </a:r>
           </a:p>
         </p:txBody>
@@ -9641,7 +9641,7 @@
                 <a:ea typeface="Segoe UI"/>
                 <a:cs typeface="Segoe UI"/>
               </a:rPr>
-              <a:t>Ví dụ thật: Danh mục bộ phận ở FBO mẫu</a:t>
+              <a:t>Ví dụ thật: Danh mục bộ phận trong bản FBO mẫu</a:t>
             </a:r>
           </a:p>
         </p:txBody>
@@ -10219,7 +10219,7 @@
                 <a:ea typeface="Segoe UI"/>
                 <a:cs typeface="Segoe UI"/>
               </a:rPr>
-              <a:t>danh sách — bảng dmbp</a:t>
+              <a:t>lưới danh sách, bảng dmbp</a:t>
             </a:r>
           </a:p>
         </p:txBody>
@@ -10382,7 +10382,7 @@
                 <a:ea typeface="Segoe UI"/>
                 <a:cs typeface="Segoe UI"/>
               </a:rPr>
-              <a:t>form thêm / sửa — khoá ma_bp</a:t>
+              <a:t>form thêm / sửa, khoá ma_bp</a:t>
             </a:r>
           </a:p>
         </p:txBody>
@@ -10545,7 +10545,7 @@
                 <a:ea typeface="Segoe UI"/>
                 <a:cs typeface="Segoe UI"/>
               </a:rPr>
-              <a:t>tra cứu từ màn khác</a:t>
+              <a:t>tra cứu từ màn hình khác</a:t>
             </a:r>
           </a:p>
         </p:txBody>
@@ -10877,7 +10877,7 @@
                 <a:ea typeface="Segoe UI"/>
                 <a:cs typeface="Segoe UI"/>
               </a:rPr>
-              <a:t>: mở form điều kiện (Filter) trước, Nhận mới chạy procedure.</a:t>
+              <a:t>: mở form điều kiện (Filter) trước, bấm Nhận thì mới chạy procedure.</a:t>
             </a:r>
           </a:p>
         </p:txBody>
@@ -11676,7 +11676,7 @@
                           <a:ea typeface="Segoe UI"/>
                           <a:cs typeface="Segoe UI"/>
                         </a:rPr>
-                        <a:t> đổi)</a:t>
+                        <a:t> để đổi)</a:t>
                       </a:r>
                     </a:p>
                   </a:txBody>
@@ -11848,7 +11848,7 @@
                 <a:ea typeface="Segoe UI"/>
                 <a:cs typeface="Segoe UI"/>
               </a:rPr>
-              <a:t> = cây menu web (</a:t>
+              <a:t>: cây menu web (</a:t>
             </a:r>
             <a:r>
               <a:rPr sz="1400" b="0" i="0">
@@ -12002,7 +12002,7 @@
                 <a:ea typeface="Segoe UI"/>
                 <a:cs typeface="Segoe UI"/>
               </a:rPr>
-              <a:t> = thông tin chức năng theo </a:t>
+              <a:t>: thông tin chức năng theo </a:t>
             </a:r>
             <a:r>
               <a:rPr sz="1400" b="0" i="0">
@@ -12024,7 +12024,7 @@
                 <a:ea typeface="Segoe UI"/>
                 <a:cs typeface="Segoe UI"/>
               </a:rPr>
-              <a:t>. Script menu: dùng </a:t>
+              <a:t>. Sinh script menu bằng </a:t>
             </a:r>
             <a:r>
               <a:rPr sz="1500" b="1" i="0">
@@ -12445,7 +12445,7 @@
                           <a:ea typeface="Segoe UI"/>
                           <a:cs typeface="Segoe UI"/>
                         </a:rPr>
-                        <a:t>Danh mục chuẩn Fast</a:t>
+                        <a:t>Danh mục chuẩn của Fast</a:t>
                       </a:r>
                     </a:p>
                   </a:txBody>
@@ -12572,7 +12572,7 @@
                           <a:ea typeface="Segoe UI"/>
                           <a:cs typeface="Segoe UI"/>
                         </a:rPr>
-                        <a:t> + chữ đầu</a:t>
+                        <a:t> + chữ cái đầu</a:t>
                       </a:r>
                     </a:p>
                   </a:txBody>
@@ -12747,7 +12747,7 @@
                           <a:ea typeface="Segoe UI"/>
                           <a:cs typeface="Segoe UI"/>
                         </a:rPr>
-                        <a:t>Mã varchar · tên nvarchar · tên khác</a:t>
+                        <a:t>Mã (varchar) · tên (nvarchar) · tên khác</a:t>
                       </a:r>
                     </a:p>
                   </a:txBody>
@@ -12876,7 +12876,7 @@
                           <a:ea typeface="Segoe UI"/>
                           <a:cs typeface="Segoe UI"/>
                         </a:rPr>
-                        <a:t> không dùng</a:t>
+                        <a:t> ngừng dùng</a:t>
                       </a:r>
                     </a:p>
                   </a:txBody>
@@ -12900,7 +12900,7 @@
                           <a:ea typeface="Segoe UI"/>
                           <a:cs typeface="Segoe UI"/>
                         </a:rPr>
-                        <a:t>Lookup lọc </a:t>
+                        <a:t>Lookup chỉ lấy </a:t>
                       </a:r>
                       <a:r>
                         <a:rPr sz="1400" b="0" i="0">
@@ -12983,7 +12983,7 @@
                           <a:ea typeface="Segoe UI"/>
                           <a:cs typeface="Segoe UI"/>
                         </a:rPr>
-                        <a:t>Ngày / người </a:t>
+                        <a:t>Ngày và người </a:t>
                       </a:r>
                       <a:r>
                         <a:rPr sz="1500" b="1" i="0">
@@ -13101,7 +13101,7 @@
                           <a:ea typeface="Segoe UI"/>
                           <a:cs typeface="Segoe UI"/>
                         </a:rPr>
-                        <a:t>Ngày / người </a:t>
+                        <a:t>Ngày và người </a:t>
                       </a:r>
                       <a:r>
                         <a:rPr sz="1500" b="1" i="0">
@@ -13123,7 +13123,7 @@
                           <a:ea typeface="Segoe UI"/>
                           <a:cs typeface="Segoe UI"/>
                         </a:rPr>
-                        <a:t> cuối</a:t>
+                        <a:t> lần cuối</a:t>
                       </a:r>
                     </a:p>
                   </a:txBody>
@@ -13550,7 +13550,7 @@
                 <a:ea typeface="Segoe UI"/>
                 <a:cs typeface="Segoe UI"/>
               </a:rPr>
-              <a:t>master — đầu phiếu</a:t>
+              <a:t>master: đầu phiếu</a:t>
             </a:r>
           </a:p>
           <a:p>
@@ -13727,7 +13727,7 @@
                 <a:ea typeface="Segoe UI"/>
                 <a:cs typeface="Segoe UI"/>
               </a:rPr>
-              <a:t>detail — chi tiết</a:t>
+              <a:t>detail: dòng chi tiết</a:t>
             </a:r>
           </a:p>
           <a:p>
@@ -13904,7 +13904,21 @@
                 <a:ea typeface="Segoe UI"/>
                 <a:cs typeface="Segoe UI"/>
               </a:rPr>
-              <a:t>bảng mẫu / gộp các kỳ</a:t>
+              <a:t>bảng mẫu; xem bằng</a:t>
+            </a:r>
+          </a:p>
+          <a:p>
+            <a:pPr algn="ctr"/>
+            <a:r>
+              <a:rPr sz="1300" b="0" i="0">
+                <a:solidFill>
+                  <a:srgbClr val="E3ECF5"/>
+                </a:solidFill>
+                <a:latin typeface="Segoe UI"/>
+                <a:ea typeface="Segoe UI"/>
+                <a:cs typeface="Segoe UI"/>
+              </a:rPr>
+              <a:t>Bcode thì gộp các kỳ</a:t>
             </a:r>
           </a:p>
         </p:txBody>
@@ -14067,7 +14081,21 @@
                 <a:ea typeface="Segoe UI"/>
                 <a:cs typeface="Segoe UI"/>
               </a:rPr>
-              <a:t>khai bảng của từng ma_ct</a:t>
+              <a:t>khai báo bảng</a:t>
+            </a:r>
+          </a:p>
+          <a:p>
+            <a:pPr algn="ctr"/>
+            <a:r>
+              <a:rPr sz="1300" b="0" i="0">
+                <a:solidFill>
+                  <a:srgbClr val="E3ECF5"/>
+                </a:solidFill>
+                <a:latin typeface="Segoe UI"/>
+                <a:ea typeface="Segoe UI"/>
+                <a:cs typeface="Segoe UI"/>
+              </a:rPr>
+              <a:t>cho từng ma_ct</a:t>
             </a:r>
           </a:p>
         </p:txBody>
@@ -14207,7 +14235,7 @@
                 <a:ea typeface="Segoe UI"/>
                 <a:cs typeface="Segoe UI"/>
               </a:rPr>
-              <a:t> là bảng mẫu; có thêm </a:t>
+              <a:t> là bảng mẫu; có thêm bảng </a:t>
             </a:r>
             <a:r>
               <a:rPr sz="1600" b="0" i="0">
@@ -14640,7 +14668,7 @@
                 <a:ea typeface="Segoe UI"/>
                 <a:cs typeface="Segoe UI"/>
               </a:rPr>
-              <a:t> </a:t>
+              <a:t> của </a:t>
             </a:r>
             <a:r>
               <a:rPr sz="1400" b="0" i="0">
@@ -14662,7 +14690,7 @@
                 <a:ea typeface="Segoe UI"/>
                 <a:cs typeface="Segoe UI"/>
               </a:rPr>
-              <a:t>. Thêm cột → </a:t>
+              <a:t>. Thêm cột: dùng </a:t>
             </a:r>
             <a:r>
               <a:rPr sz="1500" b="1" i="0">
@@ -14684,7 +14712,7 @@
                 <a:ea typeface="Segoe UI"/>
                 <a:cs typeface="Segoe UI"/>
               </a:rPr>
-              <a:t> (chạy cho mọi kỳ) rồi </a:t>
+              <a:t> (chạy cho mọi kỳ) rồi kiểm tra bằng </a:t>
             </a:r>
             <a:r>
               <a:rPr sz="1500" b="1" i="0">
@@ -15023,7 +15051,7 @@
                 <a:ea typeface="Segoe UI"/>
                 <a:cs typeface="Segoe UI"/>
               </a:rPr>
-              <a:t> màn Projects</a:t>
+              <a:t> mở màn hình Projects</a:t>
             </a:r>
           </a:p>
           <a:p>
@@ -15250,7 +15278,7 @@
                 <a:ea typeface="Segoe UI"/>
                 <a:cs typeface="Segoe UI"/>
               </a:rPr>
-              <a:t> App ↔ Sys · </a:t>
+              <a:t> đổi App ↔ Sys · </a:t>
             </a:r>
             <a:r>
               <a:rPr sz="1700" b="1" i="0">
